--- a/tests/OfficeAgent.Tests/Corpus/v1.0.0/native/inputs/p-inserttablecolumns.pptx
+++ b/tests/OfficeAgent.Tests/Corpus/v1.0.0/native/inputs/p-inserttablecolumns.pptx
@@ -2,10 +2,10 @@
 <file path=ppt/presentation.xml><?xml version="1.0" encoding="utf-8"?>
 <p:presentation xmlns:p="http://schemas.openxmlformats.org/presentationml/2006/main">
   <p:sldMasterIdLst>
-    <p:sldMasterId xmlns:r="http://schemas.openxmlformats.org/officeDocument/2006/relationships" id="2147483648" r:id="R1d362e6897d5430e"/>
+    <p:sldMasterId xmlns:r="http://schemas.openxmlformats.org/officeDocument/2006/relationships" id="2147483648" r:id="R3a22c2c4d2d34e38"/>
   </p:sldMasterIdLst>
   <p:sldIdLst>
-    <p:sldId xmlns:r="http://schemas.openxmlformats.org/officeDocument/2006/relationships" id="256" r:id="R8779f474c8f74673"/>
+    <p:sldId xmlns:r="http://schemas.openxmlformats.org/officeDocument/2006/relationships" id="256" r:id="R8654a305b9f540ed"/>
   </p:sldIdLst>
   <p:sldSz cx="12192000" cy="6858000"/>
   <p:notesSz cx="6858000" cy="9144000"/>
@@ -44,7 +44,7 @@
   </p:cSld>
   <p:clrMap bg1="lt1" tx1="dk1" bg2="lt2" tx2="dk2" accent1="accent1" accent2="accent2" accent3="accent3" accent4="accent4" accent5="accent5" accent6="accent6" hlink="hlink" folHlink="folHlink"/>
   <p:sldLayoutIdLst>
-    <p:sldLayoutId xmlns:r="http://schemas.openxmlformats.org/officeDocument/2006/relationships" id="2147483649" r:id="Rcafb10e176284e6c"/>
+    <p:sldLayoutId xmlns:r="http://schemas.openxmlformats.org/officeDocument/2006/relationships" id="2147483649" r:id="Ra9b85685c8064a9a"/>
   </p:sldLayoutIdLst>
 </p:sldMaster>
 </file>

--- a/tests/OfficeAgent.Tests/Corpus/v1.0.0/native/inputs/p-inserttablecolumns.pptx
+++ b/tests/OfficeAgent.Tests/Corpus/v1.0.0/native/inputs/p-inserttablecolumns.pptx
@@ -2,10 +2,10 @@
 <file path=ppt/presentation.xml><?xml version="1.0" encoding="utf-8"?>
 <p:presentation xmlns:p="http://schemas.openxmlformats.org/presentationml/2006/main">
   <p:sldMasterIdLst>
-    <p:sldMasterId xmlns:r="http://schemas.openxmlformats.org/officeDocument/2006/relationships" id="2147483648" r:id="R3a22c2c4d2d34e38"/>
+    <p:sldMasterId xmlns:r="http://schemas.openxmlformats.org/officeDocument/2006/relationships" id="2147483648" r:id="R7f29f0e962de4a85"/>
   </p:sldMasterIdLst>
   <p:sldIdLst>
-    <p:sldId xmlns:r="http://schemas.openxmlformats.org/officeDocument/2006/relationships" id="256" r:id="R8654a305b9f540ed"/>
+    <p:sldId xmlns:r="http://schemas.openxmlformats.org/officeDocument/2006/relationships" id="256" r:id="Re74a715d688a4c33"/>
   </p:sldIdLst>
   <p:sldSz cx="12192000" cy="6858000"/>
   <p:notesSz cx="6858000" cy="9144000"/>
@@ -44,7 +44,7 @@
   </p:cSld>
   <p:clrMap bg1="lt1" tx1="dk1" bg2="lt2" tx2="dk2" accent1="accent1" accent2="accent2" accent3="accent3" accent4="accent4" accent5="accent5" accent6="accent6" hlink="hlink" folHlink="folHlink"/>
   <p:sldLayoutIdLst>
-    <p:sldLayoutId xmlns:r="http://schemas.openxmlformats.org/officeDocument/2006/relationships" id="2147483649" r:id="Ra9b85685c8064a9a"/>
+    <p:sldLayoutId xmlns:r="http://schemas.openxmlformats.org/officeDocument/2006/relationships" id="2147483649" r:id="R57a5c01d87d74ec3"/>
   </p:sldLayoutIdLst>
 </p:sldMaster>
 </file>

--- a/tests/OfficeAgent.Tests/Corpus/v1.0.0/native/inputs/p-inserttablecolumns.pptx
+++ b/tests/OfficeAgent.Tests/Corpus/v1.0.0/native/inputs/p-inserttablecolumns.pptx
@@ -2,10 +2,10 @@
 <file path=ppt/presentation.xml><?xml version="1.0" encoding="utf-8"?>
 <p:presentation xmlns:p="http://schemas.openxmlformats.org/presentationml/2006/main">
   <p:sldMasterIdLst>
-    <p:sldMasterId xmlns:r="http://schemas.openxmlformats.org/officeDocument/2006/relationships" id="2147483648" r:id="R7f29f0e962de4a85"/>
+    <p:sldMasterId xmlns:r="http://schemas.openxmlformats.org/officeDocument/2006/relationships" id="2147483648" r:id="Re9ea792ac00b48f5"/>
   </p:sldMasterIdLst>
   <p:sldIdLst>
-    <p:sldId xmlns:r="http://schemas.openxmlformats.org/officeDocument/2006/relationships" id="256" r:id="Re74a715d688a4c33"/>
+    <p:sldId xmlns:r="http://schemas.openxmlformats.org/officeDocument/2006/relationships" id="256" r:id="R1584728f56544b18"/>
   </p:sldIdLst>
   <p:sldSz cx="12192000" cy="6858000"/>
   <p:notesSz cx="6858000" cy="9144000"/>
@@ -44,7 +44,7 @@
   </p:cSld>
   <p:clrMap bg1="lt1" tx1="dk1" bg2="lt2" tx2="dk2" accent1="accent1" accent2="accent2" accent3="accent3" accent4="accent4" accent5="accent5" accent6="accent6" hlink="hlink" folHlink="folHlink"/>
   <p:sldLayoutIdLst>
-    <p:sldLayoutId xmlns:r="http://schemas.openxmlformats.org/officeDocument/2006/relationships" id="2147483649" r:id="R57a5c01d87d74ec3"/>
+    <p:sldLayoutId xmlns:r="http://schemas.openxmlformats.org/officeDocument/2006/relationships" id="2147483649" r:id="Rb7fb879fba9d4ee7"/>
   </p:sldLayoutIdLst>
 </p:sldMaster>
 </file>

--- a/tests/OfficeAgent.Tests/Corpus/v1.0.0/native/inputs/p-inserttablecolumns.pptx
+++ b/tests/OfficeAgent.Tests/Corpus/v1.0.0/native/inputs/p-inserttablecolumns.pptx
@@ -2,10 +2,10 @@
 <file path=ppt/presentation.xml><?xml version="1.0" encoding="utf-8"?>
 <p:presentation xmlns:p="http://schemas.openxmlformats.org/presentationml/2006/main">
   <p:sldMasterIdLst>
-    <p:sldMasterId xmlns:r="http://schemas.openxmlformats.org/officeDocument/2006/relationships" id="2147483648" r:id="Re9ea792ac00b48f5"/>
+    <p:sldMasterId xmlns:r="http://schemas.openxmlformats.org/officeDocument/2006/relationships" id="2147483648" r:id="R2a9b5b54ba1e4a8d"/>
   </p:sldMasterIdLst>
   <p:sldIdLst>
-    <p:sldId xmlns:r="http://schemas.openxmlformats.org/officeDocument/2006/relationships" id="256" r:id="R1584728f56544b18"/>
+    <p:sldId xmlns:r="http://schemas.openxmlformats.org/officeDocument/2006/relationships" id="256" r:id="Rb05fd001954b4ee6"/>
   </p:sldIdLst>
   <p:sldSz cx="12192000" cy="6858000"/>
   <p:notesSz cx="6858000" cy="9144000"/>
@@ -44,7 +44,7 @@
   </p:cSld>
   <p:clrMap bg1="lt1" tx1="dk1" bg2="lt2" tx2="dk2" accent1="accent1" accent2="accent2" accent3="accent3" accent4="accent4" accent5="accent5" accent6="accent6" hlink="hlink" folHlink="folHlink"/>
   <p:sldLayoutIdLst>
-    <p:sldLayoutId xmlns:r="http://schemas.openxmlformats.org/officeDocument/2006/relationships" id="2147483649" r:id="Rb7fb879fba9d4ee7"/>
+    <p:sldLayoutId xmlns:r="http://schemas.openxmlformats.org/officeDocument/2006/relationships" id="2147483649" r:id="R0dda2848ff964e93"/>
   </p:sldLayoutIdLst>
 </p:sldMaster>
 </file>

--- a/tests/OfficeAgent.Tests/Corpus/v1.0.0/native/inputs/p-inserttablecolumns.pptx
+++ b/tests/OfficeAgent.Tests/Corpus/v1.0.0/native/inputs/p-inserttablecolumns.pptx
@@ -2,10 +2,10 @@
 <file path=ppt/presentation.xml><?xml version="1.0" encoding="utf-8"?>
 <p:presentation xmlns:p="http://schemas.openxmlformats.org/presentationml/2006/main">
   <p:sldMasterIdLst>
-    <p:sldMasterId xmlns:r="http://schemas.openxmlformats.org/officeDocument/2006/relationships" id="2147483648" r:id="R2a9b5b54ba1e4a8d"/>
+    <p:sldMasterId xmlns:r="http://schemas.openxmlformats.org/officeDocument/2006/relationships" id="2147483648" r:id="Rb7ef1c05816b4b6b"/>
   </p:sldMasterIdLst>
   <p:sldIdLst>
-    <p:sldId xmlns:r="http://schemas.openxmlformats.org/officeDocument/2006/relationships" id="256" r:id="Rb05fd001954b4ee6"/>
+    <p:sldId xmlns:r="http://schemas.openxmlformats.org/officeDocument/2006/relationships" id="256" r:id="R379c205b586241ec"/>
   </p:sldIdLst>
   <p:sldSz cx="12192000" cy="6858000"/>
   <p:notesSz cx="6858000" cy="9144000"/>
@@ -44,7 +44,7 @@
   </p:cSld>
   <p:clrMap bg1="lt1" tx1="dk1" bg2="lt2" tx2="dk2" accent1="accent1" accent2="accent2" accent3="accent3" accent4="accent4" accent5="accent5" accent6="accent6" hlink="hlink" folHlink="folHlink"/>
   <p:sldLayoutIdLst>
-    <p:sldLayoutId xmlns:r="http://schemas.openxmlformats.org/officeDocument/2006/relationships" id="2147483649" r:id="R0dda2848ff964e93"/>
+    <p:sldLayoutId xmlns:r="http://schemas.openxmlformats.org/officeDocument/2006/relationships" id="2147483649" r:id="Rbe47ff84d2294750"/>
   </p:sldLayoutIdLst>
 </p:sldMaster>
 </file>
